--- a/docs/deck/alpha-tunnel.pptx
+++ b/docs/deck/alpha-tunnel.pptx
@@ -3139,7 +3139,7 @@
                 <a:ea typeface="Calibri" pitchFamily="34" charset="-122"/>
                 <a:cs typeface="Calibri" pitchFamily="34" charset="-120"/>
               </a:rPr>
-              <a:t>144 tests pass</a:t>
+              <a:t>158 tests pass</a:t>
             </a:r>
             <a:endParaRPr lang="en-US" sz="1600" dirty="0"/>
           </a:p>

--- a/docs/deck/alpha-tunnel.pptx
+++ b/docs/deck/alpha-tunnel.pptx
@@ -3139,7 +3139,7 @@
                 <a:ea typeface="Calibri" pitchFamily="34" charset="-122"/>
                 <a:cs typeface="Calibri" pitchFamily="34" charset="-120"/>
               </a:rPr>
-              <a:t>158 tests pass</a:t>
+              <a:t>164 tests pass</a:t>
             </a:r>
             <a:endParaRPr lang="en-US" sz="1600" dirty="0"/>
           </a:p>

--- a/docs/deck/alpha-tunnel.pptx
+++ b/docs/deck/alpha-tunnel.pptx
@@ -3139,7 +3139,7 @@
                 <a:ea typeface="Calibri" pitchFamily="34" charset="-122"/>
                 <a:cs typeface="Calibri" pitchFamily="34" charset="-120"/>
               </a:rPr>
-              <a:t>164 tests pass</a:t>
+              <a:t>166 tests pass</a:t>
             </a:r>
             <a:endParaRPr lang="en-US" sz="1600" dirty="0"/>
           </a:p>
